--- a/Topic_B/Exam_Practice/TB-L09_Writing_Workshop_Invitations_Holidays_and_Past_Experiences.pptx
+++ b/Topic_B/Exam_Practice/TB-L09_Writing_Workshop_Invitations_Holidays_and_Past_Experiences.pptx
@@ -784,7 +784,11 @@
           <a:lstStyle/>
           <a:p>
             <a:r>
-              <a:rPr lang="en-US" dirty="0"/>
+              <a:rPr lang="ar-SA" dirty="0">
+                <a:latin typeface="Amiri" pitchFamily="2" charset="-78"/>
+                <a:ea typeface="Amiri" pitchFamily="2" charset="-78"/>
+                <a:cs typeface="Amiri" pitchFamily="2" charset="-78"/>
+              </a:rPr>
               <a:t>Q3 (3 min to choose and read). Title (أ) suits Core and Develop; title (ب) suits Stretch.</a:t>
             </a:r>
             <a:endParaRPr lang="en-US" dirty="0"/>
@@ -1403,7 +1407,11 @@
           <a:lstStyle/>
           <a:p>
             <a:r>
-              <a:rPr lang="en-US" dirty="0"/>
+              <a:rPr lang="ar-SA" dirty="0">
+                <a:latin typeface="Amiri" pitchFamily="2" charset="-78"/>
+                <a:ea typeface="Amiri" pitchFamily="2" charset="-78"/>
+                <a:cs typeface="Amiri" pitchFamily="2" charset="-78"/>
+              </a:rPr>
               <a:t>WELCOME (1 min) — while students join.
 • Greet each student by name as they arrive: السَّلَامُ عَلَيْكُمْ. Take the register (Pastoral Tracker: attendance 0/1).
 • 2-MINUTE CHECK-IN (SEND training): a private chat to any student who seemed unsettled last lesson — “Are you okay today? 👍 / 👎”.
@@ -1672,7 +1680,11 @@
           <a:lstStyle/>
           <a:p>
             <a:r>
-              <a:rPr lang="en-US" dirty="0"/>
+              <a:rPr lang="ar-SA" dirty="0">
+                <a:latin typeface="Amiri" pitchFamily="2" charset="-78"/>
+                <a:ea typeface="Amiri" pitchFamily="2" charset="-78"/>
+                <a:cs typeface="Amiri" pitchFamily="2" charset="-78"/>
+              </a:rPr>
               <a:t>QUESTION 1 — FORM FILLING. About 8 minutes. Core: boxes 1–6. Develop / Stretch: all 8. Box 8 uses the dual lakumā (to you two). A girl writing box 2 may add: سَأَحْضُرُ مَعَ أُسْرَتِي.</a:t>
             </a:r>
             <a:endParaRPr lang="en-US" dirty="0"/>
@@ -1936,7 +1948,11 @@
           <a:lstStyle/>
           <a:p>
             <a:r>
-              <a:rPr lang="en-US" dirty="0"/>
+              <a:rPr lang="ar-SA" dirty="0">
+                <a:latin typeface="Amiri" pitchFamily="2" charset="-78"/>
+                <a:ea typeface="Amiri" pitchFamily="2" charset="-78"/>
+                <a:cs typeface="Amiri" pitchFamily="2" charset="-78"/>
+              </a:rPr>
               <a:t>Question words: اشْكُرِي (thank) · لِمَاذَا (why) · مَاذَا (what) · اقْتَرِحِي (suggest) — two instructions to a girl; bullet 4 uses the DUAL (taḥtafilā = you two celebrate).</a:t>
             </a:r>
             <a:endParaRPr lang="en-US" dirty="0"/>
@@ -2508,6 +2524,7 @@
                   <a:srgbClr val="D4AF37"/>
                 </a:solidFill>
                 <a:latin typeface="Amiri" pitchFamily="2" charset="-78"/>
+                <a:ea typeface="Amiri" pitchFamily="2" charset="-78"/>
                 <a:cs typeface="Amiri" pitchFamily="2" charset="-78"/>
               </a:rPr>
               <a:t>م</a:t>
@@ -2714,6 +2731,7 @@
                   <a:srgbClr val="D4AF37"/>
                 </a:solidFill>
                 <a:latin typeface="Amiri" pitchFamily="2" charset="-78"/>
+                <a:ea typeface="Amiri" pitchFamily="2" charset="-78"/>
                 <a:cs typeface="Amiri" pitchFamily="2" charset="-78"/>
               </a:rPr>
               <a:t>وَرْشَةُ الكِتَابَةِ — الدَّعَوَاتُ وَالتَّجَارِبُ</a:t>
@@ -3171,6 +3189,7 @@
                   <a:srgbClr val="D4AF37"/>
                 </a:solidFill>
                 <a:latin typeface="Amiri" pitchFamily="2" charset="-78"/>
+                <a:ea typeface="Amiri" pitchFamily="2" charset="-78"/>
                 <a:cs typeface="Amiri" pitchFamily="2" charset="-78"/>
               </a:rPr>
               <a:t>م</a:t>
@@ -3491,6 +3510,7 @@
                   <a:srgbClr val="8A6D1E"/>
                 </a:solidFill>
                 <a:latin typeface="Amiri" pitchFamily="2" charset="-78"/>
+                <a:ea typeface="Amiri" pitchFamily="2" charset="-78"/>
                 <a:cs typeface="Amiri" pitchFamily="2" charset="-78"/>
               </a:rPr>
               <a:t>نَمُوذَجُ الإِجَابَةِ</a:t>
@@ -3604,6 +3624,7 @@
                   <a:srgbClr val="1F2A37"/>
                 </a:solidFill>
                 <a:latin typeface="Amiri" pitchFamily="2" charset="-78"/>
+                <a:ea typeface="Amiri" pitchFamily="2" charset="-78"/>
                 <a:cs typeface="Amiri" pitchFamily="2" charset="-78"/>
               </a:rPr>
               <a:t>عَزِيزَتِي سَلْمَى،</a:t>
@@ -3623,6 +3644,7 @@
                   <a:srgbClr val="1F2A37"/>
                 </a:solidFill>
                 <a:latin typeface="Amiri" pitchFamily="2" charset="-78"/>
+                <a:ea typeface="Amiri" pitchFamily="2" charset="-78"/>
                 <a:cs typeface="Amiri" pitchFamily="2" charset="-78"/>
               </a:rPr>
               <a:t>كَيْفَ حَالُكِ؟ شُكْرًا جَزِيلًا عَلَى دَعْوَتِكِ إِلَى حَفْلَةِ عِيدِ مِيلَادِكِ يَوْمَ السَّبْتِ. أَنَا آسِفَةٌ جِدًّا، لَا أَسْتَطِيعُ أَنْ آتِيَ، لِأَنَّنَا سَنُسَافِرُ إِلَى لِيدْزَ لِزِفَافِ ابْنِ عَمِّي. فِي الأُسْبُوعِ المَاضِي اشْتَرَيْتُ فُسْتَانًا جَدِيدًا لِلزِّفَافِ، وَهُوَ أَخْضَرُ وَجَمِيلٌ. أَرْسَلْتُ لَكِ هَدِيَّةً صَغِيرَةً مَعَ أُخْتِي. مَا رَأْيُكِ أَنْ نَلْتَقِيَ فِي المَقْهَى يَوْمَ الثُّلَاثَاءِ؟ سَأَدْعُوكِ إِلَى كَعْكَةٍ كَبِيرَةٍ!</a:t>
@@ -3642,6 +3664,7 @@
                   <a:srgbClr val="1F2A37"/>
                 </a:solidFill>
                 <a:latin typeface="Amiri" pitchFamily="2" charset="-78"/>
+                <a:ea typeface="Amiri" pitchFamily="2" charset="-78"/>
                 <a:cs typeface="Amiri" pitchFamily="2" charset="-78"/>
               </a:rPr>
               <a:t>مَعَ مَحَبَّتِي،</a:t>
@@ -3661,6 +3684,7 @@
                   <a:srgbClr val="1F2A37"/>
                 </a:solidFill>
                 <a:latin typeface="Amiri" pitchFamily="2" charset="-78"/>
+                <a:ea typeface="Amiri" pitchFamily="2" charset="-78"/>
                 <a:cs typeface="Amiri" pitchFamily="2" charset="-78"/>
               </a:rPr>
               <a:t>هِنْدُ</a:t>
@@ -3824,11 +3848,12 @@
               <a:buNone/>
             </a:pPr>
             <a:r>
-              <a:rPr lang="en-US" sz="950" b="1" dirty="0">
+              <a:rPr lang="ar-SA" sz="950" b="1" dirty="0">
                 <a:solidFill>
                   <a:srgbClr val="FFFFFF"/>
                 </a:solidFill>
                 <a:latin typeface="Calibri" pitchFamily="34" charset="0"/>
+                <a:ea typeface="Amiri" pitchFamily="2" charset="-78"/>
                 <a:cs typeface="Amiri" pitchFamily="2" charset="-78"/>
               </a:rPr>
               <a:t>شُكْرًا جَزِيلًا عَلَى دَعْوَتِكِ</a:t>
@@ -3889,11 +3914,12 @@
               <a:buNone/>
             </a:pPr>
             <a:r>
-              <a:rPr lang="en-US" sz="950" b="1" dirty="0">
+              <a:rPr lang="ar-SA" sz="950" b="1" dirty="0">
                 <a:solidFill>
                   <a:srgbClr val="FFFFFF"/>
                 </a:solidFill>
                 <a:latin typeface="Calibri" pitchFamily="34" charset="0"/>
+                <a:ea typeface="Amiri" pitchFamily="2" charset="-78"/>
                 <a:cs typeface="Amiri" pitchFamily="2" charset="-78"/>
               </a:rPr>
               <a:t>لَا أَسْتَطِيعُ أَنْ آتِيَ</a:t>
@@ -3954,11 +3980,12 @@
               <a:buNone/>
             </a:pPr>
             <a:r>
-              <a:rPr lang="en-US" sz="950" b="1" dirty="0">
+              <a:rPr lang="ar-SA" sz="950" b="1" dirty="0">
                 <a:solidFill>
                   <a:srgbClr val="FFFFFF"/>
                 </a:solidFill>
                 <a:latin typeface="Calibri" pitchFamily="34" charset="0"/>
+                <a:ea typeface="Amiri" pitchFamily="2" charset="-78"/>
                 <a:cs typeface="Amiri" pitchFamily="2" charset="-78"/>
               </a:rPr>
               <a:t>اشْتَرَيْتُ فُسْتَانًا</a:t>
@@ -4019,11 +4046,12 @@
               <a:buNone/>
             </a:pPr>
             <a:r>
-              <a:rPr lang="en-US" sz="950" b="1" dirty="0">
+              <a:rPr lang="ar-SA" sz="950" b="1" dirty="0">
                 <a:solidFill>
                   <a:srgbClr val="FFFFFF"/>
                 </a:solidFill>
                 <a:latin typeface="Calibri" pitchFamily="34" charset="0"/>
+                <a:ea typeface="Amiri" pitchFamily="2" charset="-78"/>
                 <a:cs typeface="Amiri" pitchFamily="2" charset="-78"/>
               </a:rPr>
               <a:t>مَا رَأْيُكِ أَنْ نَلْتَقِيَ</a:t>
@@ -4157,6 +4185,7 @@
                   <a:srgbClr val="D4AF37"/>
                 </a:solidFill>
                 <a:latin typeface="Amiri" pitchFamily="2" charset="-78"/>
+                <a:ea typeface="Amiri" pitchFamily="2" charset="-78"/>
                 <a:cs typeface="Amiri" pitchFamily="2" charset="-78"/>
               </a:rPr>
               <a:t>م</a:t>
@@ -4477,6 +4506,7 @@
                   <a:srgbClr val="8A6D1E"/>
                 </a:solidFill>
                 <a:latin typeface="Amiri" pitchFamily="2" charset="-78"/>
+                <a:ea typeface="Amiri" pitchFamily="2" charset="-78"/>
                 <a:cs typeface="Amiri" pitchFamily="2" charset="-78"/>
               </a:rPr>
               <a:t>نَمُوذَجُ الإِجَابَةِ</a:t>
@@ -4590,6 +4620,7 @@
                   <a:srgbClr val="1F2A37"/>
                 </a:solidFill>
                 <a:latin typeface="Amiri" pitchFamily="2" charset="-78"/>
+                <a:ea typeface="Amiri" pitchFamily="2" charset="-78"/>
                 <a:cs typeface="Amiri" pitchFamily="2" charset="-78"/>
               </a:rPr>
               <a:t>عَزِيزَتِي سَلْمَى،</a:t>
@@ -4609,6 +4640,7 @@
                   <a:srgbClr val="1F2A37"/>
                 </a:solidFill>
                 <a:latin typeface="Amiri" pitchFamily="2" charset="-78"/>
+                <a:ea typeface="Amiri" pitchFamily="2" charset="-78"/>
                 <a:cs typeface="Amiri" pitchFamily="2" charset="-78"/>
               </a:rPr>
               <a:t>تَحِيَّةً طَيِّبَةً، وَبَعْدُ، فَقَدْ فَرِحْتُ كَثِيرًا بِدَعْوَتِكِ إِلَى حَفْلَةِ عِيدِ مِيلَادِكِ السَّادِسَ عَشَرَ، وَأَشْكُرُكِ عَلَيْهَا مِنْ قَلْبِي. لٰكِنِّي، لِلْأَسَفِ، لَا أَسْتَطِيعُ أَنْ أَحْضُرَهَا، لِأَنَّ أُسْرَتِي سَتُسَافِرُ يَوْمَ الجُمُعَةِ إِلَى لِيدْزَ لِحُضُورِ زِفَافِ ابْنِ عَمِّي، وَلَنْ نَرْجِعَ قَبْلَ يَوْمِ الإِثْنَيْنِ. فِي الأُسْبُوعِ المَاضِي قَضَيْنَا أَيَّامًا فِي التَّحْضِيرِ: أَوَّلًا اشْتَرَيْنَا المَلَابِسَ، ثُمَّ سَاعَدْتُ أُمِّي فِي تَغْلِيفِ الهَدَايَا. أَرْسَلْتُ لَكِ هَدِيَّةً صَغِيرَةً مَعَ أُخْتِي، وَأَتَمَنَّى أَنْ تُعْجِبَكِ. وَإِذَا كُنْتِ مُتَفَرِّغَةً يَوْمَ الثُّلَاثَاءِ، فَمَا رَأْيُكِ أَنْ نَحْتَفِلَ مَعًا فِي مَقْهَانَا المُفَضَّلِ؟</a:t>
@@ -4628,6 +4660,7 @@
                   <a:srgbClr val="1F2A37"/>
                 </a:solidFill>
                 <a:latin typeface="Amiri" pitchFamily="2" charset="-78"/>
+                <a:ea typeface="Amiri" pitchFamily="2" charset="-78"/>
                 <a:cs typeface="Amiri" pitchFamily="2" charset="-78"/>
               </a:rPr>
               <a:t>مَعَ أَطْيَبِ التَّمَنِّيَاتِ،</a:t>
@@ -4647,6 +4680,7 @@
                   <a:srgbClr val="1F2A37"/>
                 </a:solidFill>
                 <a:latin typeface="Amiri" pitchFamily="2" charset="-78"/>
+                <a:ea typeface="Amiri" pitchFamily="2" charset="-78"/>
                 <a:cs typeface="Amiri" pitchFamily="2" charset="-78"/>
               </a:rPr>
               <a:t>هِنْدُ</a:t>
@@ -4810,11 +4844,12 @@
               <a:buNone/>
             </a:pPr>
             <a:r>
-              <a:rPr lang="en-US" sz="950" b="1" dirty="0">
+              <a:rPr lang="ar-SA" sz="950" b="1" dirty="0">
                 <a:solidFill>
                   <a:srgbClr val="FFFFFF"/>
                 </a:solidFill>
                 <a:latin typeface="Calibri" pitchFamily="34" charset="0"/>
+                <a:ea typeface="Amiri" pitchFamily="2" charset="-78"/>
                 <a:cs typeface="Amiri" pitchFamily="2" charset="-78"/>
               </a:rPr>
               <a:t>أَشْكُرُكِ عَلَيْهَا</a:t>
@@ -4875,11 +4910,12 @@
               <a:buNone/>
             </a:pPr>
             <a:r>
-              <a:rPr lang="en-US" sz="950" b="1" dirty="0">
+              <a:rPr lang="ar-SA" sz="950" b="1" dirty="0">
                 <a:solidFill>
                   <a:srgbClr val="FFFFFF"/>
                 </a:solidFill>
                 <a:latin typeface="Calibri" pitchFamily="34" charset="0"/>
+                <a:ea typeface="Amiri" pitchFamily="2" charset="-78"/>
                 <a:cs typeface="Amiri" pitchFamily="2" charset="-78"/>
               </a:rPr>
               <a:t>وَلَنْ نَرْجِعَ قَبْلَ</a:t>
@@ -4940,11 +4976,12 @@
               <a:buNone/>
             </a:pPr>
             <a:r>
-              <a:rPr lang="en-US" sz="950" b="1" dirty="0">
+              <a:rPr lang="ar-SA" sz="950" b="1" dirty="0">
                 <a:solidFill>
                   <a:srgbClr val="FFFFFF"/>
                 </a:solidFill>
                 <a:latin typeface="Calibri" pitchFamily="34" charset="0"/>
+                <a:ea typeface="Amiri" pitchFamily="2" charset="-78"/>
                 <a:cs typeface="Amiri" pitchFamily="2" charset="-78"/>
               </a:rPr>
               <a:t>أَوَّلًا … ثُمَّ</a:t>
@@ -5005,11 +5042,12 @@
               <a:buNone/>
             </a:pPr>
             <a:r>
-              <a:rPr lang="en-US" sz="950" b="1" dirty="0">
+              <a:rPr lang="ar-SA" sz="950" b="1" dirty="0">
                 <a:solidFill>
                   <a:srgbClr val="FFFFFF"/>
                 </a:solidFill>
                 <a:latin typeface="Calibri" pitchFamily="34" charset="0"/>
+                <a:ea typeface="Amiri" pitchFamily="2" charset="-78"/>
                 <a:cs typeface="Amiri" pitchFamily="2" charset="-78"/>
               </a:rPr>
               <a:t>إِذَا كُنْتِ … فَمَا رَأْيُكِ</a:t>
@@ -5143,6 +5181,7 @@
                   <a:srgbClr val="D4AF37"/>
                 </a:solidFill>
                 <a:latin typeface="Amiri" pitchFamily="2" charset="-78"/>
+                <a:ea typeface="Amiri" pitchFamily="2" charset="-78"/>
                 <a:cs typeface="Amiri" pitchFamily="2" charset="-78"/>
               </a:rPr>
               <a:t>م</a:t>
@@ -5463,6 +5502,7 @@
                   <a:srgbClr val="8A6D1E"/>
                 </a:solidFill>
                 <a:latin typeface="Amiri" pitchFamily="2" charset="-78"/>
+                <a:ea typeface="Amiri" pitchFamily="2" charset="-78"/>
                 <a:cs typeface="Amiri" pitchFamily="2" charset="-78"/>
               </a:rPr>
               <a:t>اخْتَرْ عُنْوَانًا وَاحِدًا</a:t>
@@ -5743,6 +5783,7 @@
                   <a:srgbClr val="1B3B6F"/>
                 </a:solidFill>
                 <a:latin typeface="Amiri" pitchFamily="2" charset="-78"/>
+                <a:ea typeface="Amiri" pitchFamily="2" charset="-78"/>
                 <a:cs typeface="Amiri" pitchFamily="2" charset="-78"/>
               </a:rPr>
               <a:t>مُنَاسَبَةٌ لَا أَنْسَاهَا</a:t>
@@ -5781,6 +5822,7 @@
                   <a:srgbClr val="1B3B6F"/>
                 </a:solidFill>
                 <a:latin typeface="Amiri" pitchFamily="2" charset="-78"/>
+                <a:ea typeface="Amiri" pitchFamily="2" charset="-78"/>
                 <a:cs typeface="Amiri" pitchFamily="2" charset="-78"/>
               </a:rPr>
               <a:t>(أ)</a:t>
@@ -5887,6 +5929,7 @@
                   <a:srgbClr val="1B3B6F"/>
                 </a:solidFill>
                 <a:latin typeface="Amiri" pitchFamily="2" charset="-78"/>
+                <a:ea typeface="Amiri" pitchFamily="2" charset="-78"/>
                 <a:cs typeface="Amiri" pitchFamily="2" charset="-78"/>
               </a:rPr>
               <a:t>مَا المُنَاسَبَةُ؟ وَمَتَى وَأَيْنَ؟ · مَاذَا فَعَلْتُمْ؟ (بِالتَّرْتِيبِ) · أَجْمَلُ لَحْظَةٍ · لِمَاذَا هِيَ مُهِمَّةٌ؟ وَخُطَطُكَ</a:t>
@@ -6018,6 +6061,7 @@
                   <a:srgbClr val="1B3B6F"/>
                 </a:solidFill>
                 <a:latin typeface="Amiri" pitchFamily="2" charset="-78"/>
+                <a:ea typeface="Amiri" pitchFamily="2" charset="-78"/>
                 <a:cs typeface="Amiri" pitchFamily="2" charset="-78"/>
               </a:rPr>
               <a:t>احْتِفَالَاتُنَا بَيْنَ الأَمْسِ وَاليَوْمِ</a:t>
@@ -6056,6 +6100,7 @@
                   <a:srgbClr val="1B3B6F"/>
                 </a:solidFill>
                 <a:latin typeface="Amiri" pitchFamily="2" charset="-78"/>
+                <a:ea typeface="Amiri" pitchFamily="2" charset="-78"/>
                 <a:cs typeface="Amiri" pitchFamily="2" charset="-78"/>
               </a:rPr>
               <a:t>(ب)</a:t>
@@ -6159,6 +6204,7 @@
                   <a:srgbClr val="1B3B6F"/>
                 </a:solidFill>
                 <a:latin typeface="Amiri" pitchFamily="2" charset="-78"/>
+                <a:ea typeface="Amiri" pitchFamily="2" charset="-78"/>
                 <a:cs typeface="Amiri" pitchFamily="2" charset="-78"/>
               </a:rPr>
               <a:t>كَيْفَ تَغَيَّرَتِ الاحْتِفَالَاتُ؟ · المَاضِي وَالحَاضِرُ · تَجْرِبَةٌ شَخْصِيَّةٌ · رَأْيُكَ وَاقْتِرَاحُكَ</a:t>
@@ -6358,6 +6404,7 @@
                   <a:srgbClr val="D4AF37"/>
                 </a:solidFill>
                 <a:latin typeface="Amiri" pitchFamily="2" charset="-78"/>
+                <a:ea typeface="Amiri" pitchFamily="2" charset="-78"/>
                 <a:cs typeface="Amiri" pitchFamily="2" charset="-78"/>
               </a:rPr>
               <a:t>م</a:t>
@@ -6678,6 +6725,7 @@
                   <a:srgbClr val="8A6D1E"/>
                 </a:solidFill>
                 <a:latin typeface="Amiri" pitchFamily="2" charset="-78"/>
+                <a:ea typeface="Amiri" pitchFamily="2" charset="-78"/>
                 <a:cs typeface="Amiri" pitchFamily="2" charset="-78"/>
               </a:rPr>
               <a:t>خُطَّةُ الكِتَابَةِ</a:t>
@@ -7302,6 +7350,7 @@
                   <a:srgbClr val="1B3B6F"/>
                 </a:solidFill>
                 <a:latin typeface="Amiri" pitchFamily="2" charset="-78"/>
+                <a:ea typeface="Amiri" pitchFamily="2" charset="-78"/>
                 <a:cs typeface="Amiri" pitchFamily="2" charset="-78"/>
               </a:rPr>
               <a:t>المُنَاسَبَاتُ تَجْمَعُ العَائِلَةَ.</a:t>
@@ -7401,6 +7450,7 @@
                   <a:srgbClr val="1B3B6F"/>
                 </a:solidFill>
                 <a:latin typeface="Amiri" pitchFamily="2" charset="-78"/>
+                <a:ea typeface="Amiri" pitchFamily="2" charset="-78"/>
                 <a:cs typeface="Amiri" pitchFamily="2" charset="-78"/>
               </a:rPr>
               <a:t>أَوَّلًا صَلَّيْنَا، ثُمَّ زُرْنَا الأَقَارِبَ.</a:t>
@@ -7500,6 +7550,7 @@
                   <a:srgbClr val="1B3B6F"/>
                 </a:solidFill>
                 <a:latin typeface="Amiri" pitchFamily="2" charset="-78"/>
+                <a:ea typeface="Amiri" pitchFamily="2" charset="-78"/>
                 <a:cs typeface="Amiri" pitchFamily="2" charset="-78"/>
               </a:rPr>
               <a:t>سَأَدْعُو كُلَّ أُسْرَتِي.</a:t>
@@ -7661,6 +7712,7 @@
                   <a:srgbClr val="1F2A37"/>
                 </a:solidFill>
                 <a:latin typeface="Amiri" pitchFamily="2" charset="-78"/>
+                <a:ea typeface="Amiri" pitchFamily="2" charset="-78"/>
                 <a:cs typeface="Amiri" pitchFamily="2" charset="-78"/>
               </a:rPr>
               <a:t>أ</a:t>
@@ -7687,6 +7739,7 @@
                   <a:srgbClr val="1F2A37"/>
                 </a:solidFill>
                 <a:latin typeface="Amiri" pitchFamily="2" charset="-78"/>
+                <a:ea typeface="Amiri" pitchFamily="2" charset="-78"/>
                 <a:cs typeface="Amiri" pitchFamily="2" charset="-78"/>
               </a:rPr>
               <a:t>ب</a:t>
@@ -7833,6 +7886,7 @@
                   <a:srgbClr val="D4AF37"/>
                 </a:solidFill>
                 <a:latin typeface="Amiri" pitchFamily="2" charset="-78"/>
+                <a:ea typeface="Amiri" pitchFamily="2" charset="-78"/>
                 <a:cs typeface="Amiri" pitchFamily="2" charset="-78"/>
               </a:rPr>
               <a:t>م</a:t>
@@ -8090,6 +8144,7 @@
                   <a:srgbClr val="8A6D1E"/>
                 </a:solidFill>
                 <a:latin typeface="Amiri" pitchFamily="2" charset="-78"/>
+                <a:ea typeface="Amiri" pitchFamily="2" charset="-78"/>
                 <a:cs typeface="Amiri" pitchFamily="2" charset="-78"/>
               </a:rPr>
               <a:t>أ</a:t>
@@ -8154,6 +8209,7 @@
                   <a:srgbClr val="1B3B6F"/>
                 </a:solidFill>
                 <a:latin typeface="Amiri" pitchFamily="2" charset="-78"/>
+                <a:ea typeface="Amiri" pitchFamily="2" charset="-78"/>
                 <a:cs typeface="Amiri" pitchFamily="2" charset="-78"/>
               </a:rPr>
               <a:t>أ</a:t>
@@ -8205,6 +8261,7 @@
                   <a:srgbClr val="8A6D1E"/>
                 </a:solidFill>
                 <a:latin typeface="Amiri" pitchFamily="2" charset="-78"/>
+                <a:ea typeface="Amiri" pitchFamily="2" charset="-78"/>
                 <a:cs typeface="Amiri" pitchFamily="2" charset="-78"/>
               </a:rPr>
               <a:t>نَمُوذَجُ الإِجَابَةِ</a:t>
@@ -8318,6 +8375,7 @@
                   <a:srgbClr val="1F2A37"/>
                 </a:solidFill>
                 <a:latin typeface="Amiri" pitchFamily="2" charset="-78"/>
+                <a:ea typeface="Amiri" pitchFamily="2" charset="-78"/>
                 <a:cs typeface="Amiri" pitchFamily="2" charset="-78"/>
               </a:rPr>
               <a:t>لَنْ أَنْسَى يَوْمَ تَخَرُّجِ أُخْتِي مِنَ الجَامِعَةِ فِي الصَّيْفِ المَاضِي. كَانَ الحَفْلُ فِي لَنْدَنَ، وَذَهَبْنَا بِالقِطَارِ فِي الصَّبَاحِ البَاكِرِ. لَبِسْتُ مَلَابِسَ جَدِيدَةً، وَكُنْتُ سَعِيدًا جِدًّا. اسْتَغْرَقَتِ الرِّحْلَةُ سَاعَتَيْنِ، وَكَانَ القِطَارُ مُزْدَحِمًا.</a:t>
@@ -8337,6 +8395,7 @@
                   <a:srgbClr val="1F2A37"/>
                 </a:solidFill>
                 <a:latin typeface="Amiri" pitchFamily="2" charset="-78"/>
+                <a:ea typeface="Amiri" pitchFamily="2" charset="-78"/>
                 <a:cs typeface="Amiri" pitchFamily="2" charset="-78"/>
               </a:rPr>
               <a:t>أَوَّلًا دَخَلْنَا قَاعَةً كَبِيرَةً جِدًّا، وَجَلَسْنَا مَعَ عَائِلَاتٍ كَثِيرَةٍ. ثُمَّ سَمِعْنَا اسْمَ أُخْتِي، فَصَفَّقْنَا كَثِيرًا. بَعْدَ ذٰلِكَ أَخَذْنَا صُوَرًا أَمَامَ الجَامِعَةِ. أَخِيرًا تَعَشَّيْنَا فِي مَطْعَمٍ يَمَنِيٍّ، وَأَكَلْنَا المَنْدِيَ، ثُمَّ رَجَعْنَا إِلَى البَيْتِ مُتْعَبِينَ لٰكِنْ سُعَدَاءَ.</a:t>
@@ -8356,6 +8415,7 @@
                   <a:srgbClr val="1F2A37"/>
                 </a:solidFill>
                 <a:latin typeface="Amiri" pitchFamily="2" charset="-78"/>
+                <a:ea typeface="Amiri" pitchFamily="2" charset="-78"/>
                 <a:cs typeface="Amiri" pitchFamily="2" charset="-78"/>
               </a:rPr>
               <a:t>كَانَتْ أَجْمَلُ لَحْظَةٍ عِنْدَمَا بَكَتْ أُمِّي مِنَ الفَرَحِ. قَالَتْ: «أَنَا فَخُورَةٌ بِكِ». أَعْطَى أَبِي أُخْتِي سَاعَةً ذَهَبِيَّةً هَدِيَّةً، وَأَعْطَيْتُهَا أَنَا بِطَاقَةً كَتَبْتُ فِيهَا كَلِمَاتٍ جَمِيلَةً.</a:t>
@@ -8375,6 +8435,7 @@
                   <a:srgbClr val="1F2A37"/>
                 </a:solidFill>
                 <a:latin typeface="Amiri" pitchFamily="2" charset="-78"/>
+                <a:ea typeface="Amiri" pitchFamily="2" charset="-78"/>
                 <a:cs typeface="Amiri" pitchFamily="2" charset="-78"/>
               </a:rPr>
               <a:t>فِي رَأْيِي، هٰذِهِ المُنَاسَبَاتُ مُهِمَّةٌ، لِأَنَّهَا تَجْمَعُ العَائِلَةَ. فِي المُسْتَقْبَلِ سَأَدْرُسُ فِي الجَامِعَةِ أَيْضًا، وَسَأَدْعُو كُلَّ أُسْرَتِي إِلَى حَفْلِ تَخَرُّجِي.</a:t>
@@ -8538,11 +8599,12 @@
               <a:buNone/>
             </a:pPr>
             <a:r>
-              <a:rPr lang="en-US" sz="950" b="1" dirty="0">
+              <a:rPr lang="ar-SA" sz="950" b="1" dirty="0">
                 <a:solidFill>
                   <a:srgbClr val="FFFFFF"/>
                 </a:solidFill>
                 <a:latin typeface="Calibri" pitchFamily="34" charset="0"/>
+                <a:ea typeface="Amiri" pitchFamily="2" charset="-78"/>
                 <a:cs typeface="Amiri" pitchFamily="2" charset="-78"/>
               </a:rPr>
               <a:t>لَنْ أَنْسَى</a:t>
@@ -8603,11 +8665,12 @@
               <a:buNone/>
             </a:pPr>
             <a:r>
-              <a:rPr lang="en-US" sz="950" b="1" dirty="0">
+              <a:rPr lang="ar-SA" sz="950" b="1" dirty="0">
                 <a:solidFill>
                   <a:srgbClr val="FFFFFF"/>
                 </a:solidFill>
                 <a:latin typeface="Calibri" pitchFamily="34" charset="0"/>
+                <a:ea typeface="Amiri" pitchFamily="2" charset="-78"/>
                 <a:cs typeface="Amiri" pitchFamily="2" charset="-78"/>
               </a:rPr>
               <a:t>أَوَّلًا … ثُمَّ … بَعْدَ ذٰلِكَ … أَخِيرًا</a:t>
@@ -8668,11 +8731,12 @@
               <a:buNone/>
             </a:pPr>
             <a:r>
-              <a:rPr lang="en-US" sz="950" b="1" dirty="0">
+              <a:rPr lang="ar-SA" sz="950" b="1" dirty="0">
                 <a:solidFill>
                   <a:srgbClr val="FFFFFF"/>
                 </a:solidFill>
                 <a:latin typeface="Calibri" pitchFamily="34" charset="0"/>
+                <a:ea typeface="Amiri" pitchFamily="2" charset="-78"/>
                 <a:cs typeface="Amiri" pitchFamily="2" charset="-78"/>
               </a:rPr>
               <a:t>أَجْمَلُ لَحْظَةٍ … عِنْدَمَا</a:t>
@@ -8733,11 +8797,12 @@
               <a:buNone/>
             </a:pPr>
             <a:r>
-              <a:rPr lang="en-US" sz="950" b="1" dirty="0">
+              <a:rPr lang="ar-SA" sz="950" b="1" dirty="0">
                 <a:solidFill>
                   <a:srgbClr val="FFFFFF"/>
                 </a:solidFill>
                 <a:latin typeface="Calibri" pitchFamily="34" charset="0"/>
+                <a:ea typeface="Amiri" pitchFamily="2" charset="-78"/>
                 <a:cs typeface="Amiri" pitchFamily="2" charset="-78"/>
               </a:rPr>
               <a:t>سَأَدْعُو</a:t>
@@ -8871,6 +8936,7 @@
                   <a:srgbClr val="D4AF37"/>
                 </a:solidFill>
                 <a:latin typeface="Amiri" pitchFamily="2" charset="-78"/>
+                <a:ea typeface="Amiri" pitchFamily="2" charset="-78"/>
                 <a:cs typeface="Amiri" pitchFamily="2" charset="-78"/>
               </a:rPr>
               <a:t>م</a:t>
@@ -9128,6 +9194,7 @@
                   <a:srgbClr val="8A6D1E"/>
                 </a:solidFill>
                 <a:latin typeface="Amiri" pitchFamily="2" charset="-78"/>
+                <a:ea typeface="Amiri" pitchFamily="2" charset="-78"/>
                 <a:cs typeface="Amiri" pitchFamily="2" charset="-78"/>
               </a:rPr>
               <a:t>أ</a:t>
@@ -9192,6 +9259,7 @@
                   <a:srgbClr val="1B3B6F"/>
                 </a:solidFill>
                 <a:latin typeface="Amiri" pitchFamily="2" charset="-78"/>
+                <a:ea typeface="Amiri" pitchFamily="2" charset="-78"/>
                 <a:cs typeface="Amiri" pitchFamily="2" charset="-78"/>
               </a:rPr>
               <a:t>أ</a:t>
@@ -9243,6 +9311,7 @@
                   <a:srgbClr val="8A6D1E"/>
                 </a:solidFill>
                 <a:latin typeface="Amiri" pitchFamily="2" charset="-78"/>
+                <a:ea typeface="Amiri" pitchFamily="2" charset="-78"/>
                 <a:cs typeface="Amiri" pitchFamily="2" charset="-78"/>
               </a:rPr>
               <a:t>نَمُوذَجُ الإِجَابَةِ</a:t>
@@ -9356,6 +9425,7 @@
                   <a:srgbClr val="1F2A37"/>
                 </a:solidFill>
                 <a:latin typeface="Amiri" pitchFamily="2" charset="-78"/>
+                <a:ea typeface="Amiri" pitchFamily="2" charset="-78"/>
                 <a:cs typeface="Amiri" pitchFamily="2" charset="-78"/>
               </a:rPr>
               <a:t>هُنَاكَ أَيَّامٌ تَبْقَى فِي الذَّاكِرَةِ كَأَنَّهَا حَدَثَتْ أَمْسِ، وَمِنْهَا يَوْمُ زِفَافِ خَالِي فِي عَمَّانَ قَبْلَ سَنَتَيْنِ. سَافَرْنَا قَبْلَ الزِّفَافِ بِأُسْبُوعٍ، فَوَجَدْنَا البَيْتَ مَلِيئًا بِالأَقَارِبِ القَادِمِينَ مِنْ كُلِّ مَكَانٍ: مِنَ الخَلِيجِ وَأَلْمَانْيَا وَأَمْرِيكَا، وَبَعْضُهُمْ لَمْ أَرَهُمْ مُنْذُ طُفُولَتِي.</a:t>
@@ -9375,6 +9445,7 @@
                   <a:srgbClr val="1F2A37"/>
                 </a:solidFill>
                 <a:latin typeface="Amiri" pitchFamily="2" charset="-78"/>
+                <a:ea typeface="Amiri" pitchFamily="2" charset="-78"/>
                 <a:cs typeface="Amiri" pitchFamily="2" charset="-78"/>
               </a:rPr>
               <a:t>قَضَيْنَا الأَيَّامَ الأُولَى فِي التَّحْضِيرِ؛ فَكَانَتِ النِّسَاءُ يَطْبُخْنَ المَنْسَفَ، أَمَّا نَحْنُ الشَّبَابَ فَعَلَّقْنَا الأَضْوَاءَ وَزَيَّنَّا السَّاحَةَ. وَفِي لَيْلَةِ الحِنَّاءِ رَقَصْنَا الدَّبْكَةَ حَتَّى مُنْتَصَفِ اللَّيْلِ، بَيْنَمَا كَانَ الكِبَارُ يُغَنُّونَ أَغَانِيَ قَدِيمَةً لَمْ أَسْمَعْهَا مِنْ قَبْلُ.</a:t>
@@ -9394,6 +9465,7 @@
                   <a:srgbClr val="1F2A37"/>
                 </a:solidFill>
                 <a:latin typeface="Amiri" pitchFamily="2" charset="-78"/>
+                <a:ea typeface="Amiri" pitchFamily="2" charset="-78"/>
                 <a:cs typeface="Amiri" pitchFamily="2" charset="-78"/>
               </a:rPr>
               <a:t>لٰكِنَّ اللَّحْظَةَ الَّتِي لَنْ أَنْسَاهَا حَدَثَتْ يَوْمَ الزِّفَافِ نَفْسِهِ؛ فَقَدْ وَقَفَ جَدِّي، وَهُوَ فِي الثَّمَانِينَ مِنْ عُمْرِهِ، وَأَلْقَى قَصِيدَةً كَتَبَهَا لِخَالِي، فَسَكَتَ الجَمِيعُ، ثُمَّ صَفَّقُوا طَوِيلًا وَالدُّمُوعُ فِي عُيُونِهِمْ.</a:t>
@@ -9413,6 +9485,7 @@
                   <a:srgbClr val="1F2A37"/>
                 </a:solidFill>
                 <a:latin typeface="Amiri" pitchFamily="2" charset="-78"/>
+                <a:ea typeface="Amiri" pitchFamily="2" charset="-78"/>
                 <a:cs typeface="Amiri" pitchFamily="2" charset="-78"/>
               </a:rPr>
               <a:t>صَحِيحٌ أَنَّ الرِّحْلَةَ كَانَتْ مُتْعِبَةً وَمُكْلِفَةً، غَيْرَ أَنَّهَا ذَكَّرَتْنِي بِأَنَّ جُذُورِي هُنَاكَ. وَإِذَا تَزَوَّجْتُ فِي يَوْمٍ مِنَ الأَيَّامِ، فَسَأُقِيمُ زِفَافِي فِي القَرْيَةِ نَفْسِهَا، وَلَوْ كَانَ جَدِّي مَا زَالَ حَيًّا، لَطَلَبْتُ مِنْهُ قَصِيدَةً أُخْرَى.</a:t>
@@ -9511,11 +9584,12 @@
               <a:buNone/>
             </a:pPr>
             <a:r>
-              <a:rPr lang="en-US" sz="950" b="1" dirty="0">
+              <a:rPr lang="ar-SA" sz="950" b="1" dirty="0">
                 <a:solidFill>
                   <a:srgbClr val="FFFFFF"/>
                 </a:solidFill>
                 <a:latin typeface="Calibri" pitchFamily="34" charset="0"/>
+                <a:ea typeface="Amiri" pitchFamily="2" charset="-78"/>
                 <a:cs typeface="Amiri" pitchFamily="2" charset="-78"/>
               </a:rPr>
               <a:t>كَأَنَّهَا حَدَثَتْ أَمْسِ</a:t>
@@ -9576,11 +9650,12 @@
               <a:buNone/>
             </a:pPr>
             <a:r>
-              <a:rPr lang="en-US" sz="950" b="1" dirty="0">
+              <a:rPr lang="ar-SA" sz="950" b="1" dirty="0">
                 <a:solidFill>
                   <a:srgbClr val="FFFFFF"/>
                 </a:solidFill>
                 <a:latin typeface="Calibri" pitchFamily="34" charset="0"/>
+                <a:ea typeface="Amiri" pitchFamily="2" charset="-78"/>
                 <a:cs typeface="Amiri" pitchFamily="2" charset="-78"/>
               </a:rPr>
               <a:t>أَمَّا نَحْنُ الشَّبَابَ فَعَلَّقْنَا</a:t>
@@ -9641,11 +9716,12 @@
               <a:buNone/>
             </a:pPr>
             <a:r>
-              <a:rPr lang="en-US" sz="950" b="1" dirty="0">
+              <a:rPr lang="ar-SA" sz="950" b="1" dirty="0">
                 <a:solidFill>
                   <a:srgbClr val="FFFFFF"/>
                 </a:solidFill>
                 <a:latin typeface="Calibri" pitchFamily="34" charset="0"/>
+                <a:ea typeface="Amiri" pitchFamily="2" charset="-78"/>
                 <a:cs typeface="Amiri" pitchFamily="2" charset="-78"/>
               </a:rPr>
               <a:t>وَهُوَ فِي الثَّمَانِينَ</a:t>
@@ -9706,11 +9782,12 @@
               <a:buNone/>
             </a:pPr>
             <a:r>
-              <a:rPr lang="en-US" sz="950" b="1" dirty="0">
+              <a:rPr lang="ar-SA" sz="950" b="1" dirty="0">
                 <a:solidFill>
                   <a:srgbClr val="FFFFFF"/>
                 </a:solidFill>
                 <a:latin typeface="Calibri" pitchFamily="34" charset="0"/>
+                <a:ea typeface="Amiri" pitchFamily="2" charset="-78"/>
                 <a:cs typeface="Amiri" pitchFamily="2" charset="-78"/>
               </a:rPr>
               <a:t>لَوْ كَانَ … لَطَلَبْتُ</a:t>
@@ -9844,6 +9921,7 @@
                   <a:srgbClr val="D4AF37"/>
                 </a:solidFill>
                 <a:latin typeface="Amiri" pitchFamily="2" charset="-78"/>
+                <a:ea typeface="Amiri" pitchFamily="2" charset="-78"/>
                 <a:cs typeface="Amiri" pitchFamily="2" charset="-78"/>
               </a:rPr>
               <a:t>م</a:t>
@@ -10101,6 +10179,7 @@
                   <a:srgbClr val="8A6D1E"/>
                 </a:solidFill>
                 <a:latin typeface="Amiri" pitchFamily="2" charset="-78"/>
+                <a:ea typeface="Amiri" pitchFamily="2" charset="-78"/>
                 <a:cs typeface="Amiri" pitchFamily="2" charset="-78"/>
               </a:rPr>
               <a:t>ب</a:t>
@@ -10165,6 +10244,7 @@
                   <a:srgbClr val="1B3B6F"/>
                 </a:solidFill>
                 <a:latin typeface="Amiri" pitchFamily="2" charset="-78"/>
+                <a:ea typeface="Amiri" pitchFamily="2" charset="-78"/>
                 <a:cs typeface="Amiri" pitchFamily="2" charset="-78"/>
               </a:rPr>
               <a:t>ب</a:t>
@@ -10216,6 +10296,7 @@
                   <a:srgbClr val="8A6D1E"/>
                 </a:solidFill>
                 <a:latin typeface="Amiri" pitchFamily="2" charset="-78"/>
+                <a:ea typeface="Amiri" pitchFamily="2" charset="-78"/>
                 <a:cs typeface="Amiri" pitchFamily="2" charset="-78"/>
               </a:rPr>
               <a:t>نَمُوذَجُ الإِجَابَةِ</a:t>
@@ -10329,6 +10410,7 @@
                   <a:srgbClr val="1F2A37"/>
                 </a:solidFill>
                 <a:latin typeface="Amiri" pitchFamily="2" charset="-78"/>
+                <a:ea typeface="Amiri" pitchFamily="2" charset="-78"/>
                 <a:cs typeface="Amiri" pitchFamily="2" charset="-78"/>
               </a:rPr>
               <a:t>تَغَيَّرَتْ طَرِيقَةُ احْتِفَالِنَا بِالمُنَاسَبَاتِ كَثِيرًا خِلَالَ جِيلٍ وَاحِدٍ. فَالأَعْرَاسُ الَّتِي كَانَتْ تَسْتَمِرُّ أُسْبُوعًا فِي القَرْيَةِ، وَيُشَارِكُ فِيهَا الجِيرَانُ كُلُّهُمْ، أَصْبَحَتْ لَيْلَةً وَاحِدَةً فِي قَاعَةٍ فَاخِرَةٍ مُكْلِفَةٍ، وَكَثِيرٌ مِنَ الضُّيُوفِ لَا يَعْرِفُونَ العَرُوسَيْنِ.</a:t>
@@ -10348,6 +10430,7 @@
                   <a:srgbClr val="1F2A37"/>
                 </a:solidFill>
                 <a:latin typeface="Amiri" pitchFamily="2" charset="-78"/>
+                <a:ea typeface="Amiri" pitchFamily="2" charset="-78"/>
                 <a:cs typeface="Amiri" pitchFamily="2" charset="-78"/>
               </a:rPr>
               <a:t>فِي المَاضِي كَانَ النَّاسُ يَطْبُخُونَ مَعًا، وَيَصْنَعُونَ الزِّينَةَ بِأَيْدِيهِمْ، وَيُغَنُّونَ أَغَانِيَ تَقْلِيدِيَّةً، أَمَّا اليَوْمَ فَنَشْتَرِي كُلَّ شَيْءٍ جَاهِزًا، وَنَقْضِي جُزْءًا كَبِيرًا مِنَ الحَفْلَةِ فِي تَصْوِيرِهَا لِوَسَائِلِ التَّوَاصُلِ، بَدَلًا مِنْ أَنْ نَعِيشَ اللَّحْظَةَ مَعَ مَنْ نُحِبُّ.</a:t>
@@ -10367,6 +10450,7 @@
                   <a:srgbClr val="1F2A37"/>
                 </a:solidFill>
                 <a:latin typeface="Amiri" pitchFamily="2" charset="-78"/>
+                <a:ea typeface="Amiri" pitchFamily="2" charset="-78"/>
                 <a:cs typeface="Amiri" pitchFamily="2" charset="-78"/>
               </a:rPr>
               <a:t>شَعَرْتُ بِهٰذَا الفَرْقِ فِي العِيدِ المَاضِي؛ فَقَدِ اقْتَرَحَتْ جَدَّتِي أَنْ نَخْبِزَ كَعْكَ العِيدِ بِأَنْفُسِنَا بَدَلًا مِنْ شِرَائِهِ. فِي البِدَايَةِ تَذَمَّرْنَا، لٰكِنَّنَا قَضَيْنَا لَيْلَةً كَامِلَةً نَضْحَكُ وَنَعْجِنُ وَنَسْمَعُ قِصَصَهَا، فَكَانَتْ أَجْمَلَ لَيْلَةٍ فِي العِيدِ كُلِّهِ.</a:t>
@@ -10386,6 +10470,7 @@
                   <a:srgbClr val="1F2A37"/>
                 </a:solidFill>
                 <a:latin typeface="Amiri" pitchFamily="2" charset="-78"/>
+                <a:ea typeface="Amiri" pitchFamily="2" charset="-78"/>
                 <a:cs typeface="Amiri" pitchFamily="2" charset="-78"/>
               </a:rPr>
               <a:t>صَحِيحٌ أَنَّ الحَيَاةَ الحَدِيثَةَ جَعَلَتِ التَّحْضِيرَ أَسْهَلَ، غَيْرَ أَنَّهَا أَخَذَتْ مِنَّا جُزْءًا مِنْ رُوحِ المُنَاسَبَاتِ. وَلَوْ أَعَدْنَا بَعْضَ التَّقَالِيدِ البَسِيطَةِ إِلَى احْتِفَالَاتِنَا، لَشَعَرْنَا بِقُرْبٍ أَكْبَرَ مِنْ عَائِلَاتِنَا وَمِنْ تُرَاثِنَا.</a:t>
@@ -10484,11 +10569,12 @@
               <a:buNone/>
             </a:pPr>
             <a:r>
-              <a:rPr lang="en-US" sz="950" b="1" dirty="0">
+              <a:rPr lang="ar-SA" sz="950" b="1" dirty="0">
                 <a:solidFill>
                   <a:srgbClr val="FFFFFF"/>
                 </a:solidFill>
                 <a:latin typeface="Calibri" pitchFamily="34" charset="0"/>
+                <a:ea typeface="Amiri" pitchFamily="2" charset="-78"/>
                 <a:cs typeface="Amiri" pitchFamily="2" charset="-78"/>
               </a:rPr>
               <a:t>الَّتِي كَانَتْ تَسْتَمِرُّ</a:t>
@@ -10549,11 +10635,12 @@
               <a:buNone/>
             </a:pPr>
             <a:r>
-              <a:rPr lang="en-US" sz="950" b="1" dirty="0">
+              <a:rPr lang="ar-SA" sz="950" b="1" dirty="0">
                 <a:solidFill>
                   <a:srgbClr val="FFFFFF"/>
                 </a:solidFill>
                 <a:latin typeface="Calibri" pitchFamily="34" charset="0"/>
+                <a:ea typeface="Amiri" pitchFamily="2" charset="-78"/>
                 <a:cs typeface="Amiri" pitchFamily="2" charset="-78"/>
               </a:rPr>
               <a:t>أَمَّا اليَوْمَ فَنَشْتَرِي</a:t>
@@ -10614,11 +10701,12 @@
               <a:buNone/>
             </a:pPr>
             <a:r>
-              <a:rPr lang="en-US" sz="950" b="1" dirty="0">
+              <a:rPr lang="ar-SA" sz="950" b="1" dirty="0">
                 <a:solidFill>
                   <a:srgbClr val="FFFFFF"/>
                 </a:solidFill>
                 <a:latin typeface="Calibri" pitchFamily="34" charset="0"/>
+                <a:ea typeface="Amiri" pitchFamily="2" charset="-78"/>
                 <a:cs typeface="Amiri" pitchFamily="2" charset="-78"/>
               </a:rPr>
               <a:t>بَدَلًا مِنْ شِرَائِهِ</a:t>
@@ -10679,11 +10767,12 @@
               <a:buNone/>
             </a:pPr>
             <a:r>
-              <a:rPr lang="en-US" sz="950" b="1" dirty="0">
+              <a:rPr lang="ar-SA" sz="950" b="1" dirty="0">
                 <a:solidFill>
                   <a:srgbClr val="FFFFFF"/>
                 </a:solidFill>
                 <a:latin typeface="Calibri" pitchFamily="34" charset="0"/>
+                <a:ea typeface="Amiri" pitchFamily="2" charset="-78"/>
                 <a:cs typeface="Amiri" pitchFamily="2" charset="-78"/>
               </a:rPr>
               <a:t>لَوْ أَعَدْنَا … لَشَعَرْنَا</a:t>
@@ -10817,6 +10906,7 @@
                   <a:srgbClr val="D4AF37"/>
                 </a:solidFill>
                 <a:latin typeface="Amiri" pitchFamily="2" charset="-78"/>
+                <a:ea typeface="Amiri" pitchFamily="2" charset="-78"/>
                 <a:cs typeface="Amiri" pitchFamily="2" charset="-78"/>
               </a:rPr>
               <a:t>م</a:t>
@@ -11137,6 +11227,7 @@
                   <a:srgbClr val="8A6D1E"/>
                 </a:solidFill>
                 <a:latin typeface="Amiri" pitchFamily="2" charset="-78"/>
+                <a:ea typeface="Amiri" pitchFamily="2" charset="-78"/>
                 <a:cs typeface="Amiri" pitchFamily="2" charset="-78"/>
               </a:rPr>
               <a:t>قَيِّمْ عَمَلَكَ</a:t>
@@ -12381,6 +12472,7 @@
                   <a:srgbClr val="FFFFFF"/>
                 </a:solidFill>
                 <a:latin typeface="Amiri" pitchFamily="2" charset="-78"/>
+                <a:ea typeface="Amiri" pitchFamily="2" charset="-78"/>
                 <a:cs typeface="Amiri" pitchFamily="2" charset="-78"/>
               </a:rPr>
               <a:t>أَحْسَنْتُمْ! إِلَى اللِّقَاءِ</a:t>
@@ -12533,6 +12625,7 @@
                   <a:srgbClr val="D4AF37"/>
                 </a:solidFill>
                 <a:latin typeface="Amiri" pitchFamily="2" charset="-78"/>
+                <a:ea typeface="Amiri" pitchFamily="2" charset="-78"/>
                 <a:cs typeface="Amiri" pitchFamily="2" charset="-78"/>
               </a:rPr>
               <a:t>وَرْشَةُ التَّدْرِيبِ</a:t>
@@ -12666,6 +12759,7 @@
                   <a:srgbClr val="D4AF37"/>
                 </a:solidFill>
                 <a:latin typeface="Amiri" pitchFamily="2" charset="-78"/>
+                <a:ea typeface="Amiri" pitchFamily="2" charset="-78"/>
                 <a:cs typeface="Amiri" pitchFamily="2" charset="-78"/>
               </a:rPr>
               <a:t>م</a:t>
@@ -12986,6 +13080,7 @@
                   <a:srgbClr val="8A6D1E"/>
                 </a:solidFill>
                 <a:latin typeface="Amiri" pitchFamily="2" charset="-78"/>
+                <a:ea typeface="Amiri" pitchFamily="2" charset="-78"/>
                 <a:cs typeface="Amiri" pitchFamily="2" charset="-78"/>
               </a:rPr>
               <a:t>آدَابُ الصَّفِّ</a:t>
@@ -14517,6 +14612,7 @@
                   <a:srgbClr val="D4AF37"/>
                 </a:solidFill>
                 <a:latin typeface="Amiri" pitchFamily="2" charset="-78"/>
+                <a:ea typeface="Amiri" pitchFamily="2" charset="-78"/>
                 <a:cs typeface="Amiri" pitchFamily="2" charset="-78"/>
               </a:rPr>
               <a:t>م</a:t>
@@ -14837,6 +14933,7 @@
                   <a:srgbClr val="8A6D1E"/>
                 </a:solidFill>
                 <a:latin typeface="Amiri" pitchFamily="2" charset="-78"/>
+                <a:ea typeface="Amiri" pitchFamily="2" charset="-78"/>
                 <a:cs typeface="Amiri" pitchFamily="2" charset="-78"/>
               </a:rPr>
               <a:t>خَرِيطَةُ الوَرْشَةِ</a:t>
@@ -15151,6 +15248,7 @@
                   <a:srgbClr val="1B3B6F"/>
                 </a:solidFill>
                 <a:latin typeface="Amiri" pitchFamily="2" charset="-78"/>
+                <a:ea typeface="Amiri" pitchFamily="2" charset="-78"/>
                 <a:cs typeface="Amiri" pitchFamily="2" charset="-78"/>
               </a:rPr>
               <a:t>كَيْفَ</a:t>
@@ -15427,6 +15525,7 @@
                   <a:srgbClr val="1E6B52"/>
                 </a:solidFill>
                 <a:latin typeface="Amiri" pitchFamily="2" charset="-78"/>
+                <a:ea typeface="Amiri" pitchFamily="2" charset="-78"/>
                 <a:cs typeface="Amiri" pitchFamily="2" charset="-78"/>
               </a:rPr>
               <a:t>الاسْتِمَارَةُ</a:t>
@@ -15703,6 +15802,7 @@
                   <a:srgbClr val="1E6B52"/>
                 </a:solidFill>
                 <a:latin typeface="Amiri" pitchFamily="2" charset="-78"/>
+                <a:ea typeface="Amiri" pitchFamily="2" charset="-78"/>
                 <a:cs typeface="Amiri" pitchFamily="2" charset="-78"/>
               </a:rPr>
               <a:t>الرِّسَالَةُ</a:t>
@@ -15979,6 +16079,7 @@
                   <a:srgbClr val="1E6B52"/>
                 </a:solidFill>
                 <a:latin typeface="Amiri" pitchFamily="2" charset="-78"/>
+                <a:ea typeface="Amiri" pitchFamily="2" charset="-78"/>
                 <a:cs typeface="Amiri" pitchFamily="2" charset="-78"/>
               </a:rPr>
               <a:t>المَقَالُ</a:t>
@@ -16255,6 +16356,7 @@
                   <a:srgbClr val="8A6D1E"/>
                 </a:solidFill>
                 <a:latin typeface="Amiri" pitchFamily="2" charset="-78"/>
+                <a:ea typeface="Amiri" pitchFamily="2" charset="-78"/>
                 <a:cs typeface="Amiri" pitchFamily="2" charset="-78"/>
               </a:rPr>
               <a:t>قَيِّمْ</a:t>
@@ -16498,6 +16600,7 @@
                   <a:srgbClr val="D4AF37"/>
                 </a:solidFill>
                 <a:latin typeface="Amiri" pitchFamily="2" charset="-78"/>
+                <a:ea typeface="Amiri" pitchFamily="2" charset="-78"/>
                 <a:cs typeface="Amiri" pitchFamily="2" charset="-78"/>
               </a:rPr>
               <a:t>م</a:t>
@@ -16818,6 +16921,7 @@
                   <a:srgbClr val="8A6D1E"/>
                 </a:solidFill>
                 <a:latin typeface="Amiri" pitchFamily="2" charset="-78"/>
+                <a:ea typeface="Amiri" pitchFamily="2" charset="-78"/>
                 <a:cs typeface="Amiri" pitchFamily="2" charset="-78"/>
               </a:rPr>
               <a:t>امْتِحَانُ الكِتَابَةِ</a:t>
@@ -17442,6 +17546,7 @@
                   <a:srgbClr val="1B3B6F"/>
                 </a:solidFill>
                 <a:latin typeface="Amiri" pitchFamily="2" charset="-78"/>
+                <a:ea typeface="Amiri" pitchFamily="2" charset="-78"/>
                 <a:cs typeface="Amiri" pitchFamily="2" charset="-78"/>
               </a:rPr>
               <a:t>شُكْرًا جَزِيلًا عَلَى دَعْوَتِكِ</a:t>
@@ -17541,6 +17646,7 @@
                   <a:srgbClr val="1B3B6F"/>
                 </a:solidFill>
                 <a:latin typeface="Amiri" pitchFamily="2" charset="-78"/>
+                <a:ea typeface="Amiri" pitchFamily="2" charset="-78"/>
                 <a:cs typeface="Amiri" pitchFamily="2" charset="-78"/>
               </a:rPr>
               <a:t>آسِفَةٌ جِدًّا، لَا أَسْتَطِيعُ أَنْ آتِيَ، لِأَنَّ …</a:t>
@@ -17640,6 +17746,7 @@
                   <a:srgbClr val="1B3B6F"/>
                 </a:solidFill>
                 <a:latin typeface="Amiri" pitchFamily="2" charset="-78"/>
+                <a:ea typeface="Amiri" pitchFamily="2" charset="-78"/>
                 <a:cs typeface="Amiri" pitchFamily="2" charset="-78"/>
               </a:rPr>
               <a:t>أَوَّلًا … ثُمَّ … وَأَخِيرًا …</a:t>
@@ -17811,6 +17918,7 @@
                   <a:srgbClr val="D4AF37"/>
                 </a:solidFill>
                 <a:latin typeface="Amiri" pitchFamily="2" charset="-78"/>
+                <a:ea typeface="Amiri" pitchFamily="2" charset="-78"/>
                 <a:cs typeface="Amiri" pitchFamily="2" charset="-78"/>
               </a:rPr>
               <a:t>م</a:t>
@@ -18131,6 +18239,7 @@
                   <a:srgbClr val="8A6D1E"/>
                 </a:solidFill>
                 <a:latin typeface="Amiri" pitchFamily="2" charset="-78"/>
+                <a:ea typeface="Amiri" pitchFamily="2" charset="-78"/>
                 <a:cs typeface="Amiri" pitchFamily="2" charset="-78"/>
               </a:rPr>
               <a:t>بِطَاقَةُ الرَّدِّ عَلَى الدَّعْوَةِ</a:t>
@@ -18487,6 +18596,7 @@
                   <a:srgbClr val="1B3B6F"/>
                 </a:solidFill>
                 <a:latin typeface="Amiri" pitchFamily="2" charset="-78"/>
+                <a:ea typeface="Amiri" pitchFamily="2" charset="-78"/>
                 <a:cs typeface="Amiri" pitchFamily="2" charset="-78"/>
               </a:rPr>
               <a:t>الاسْمُ</a:t>
@@ -18731,6 +18841,7 @@
                   <a:srgbClr val="1B3B6F"/>
                 </a:solidFill>
                 <a:latin typeface="Amiri" pitchFamily="2" charset="-78"/>
+                <a:ea typeface="Amiri" pitchFamily="2" charset="-78"/>
                 <a:cs typeface="Amiri" pitchFamily="2" charset="-78"/>
               </a:rPr>
               <a:t>هَلْ سَتَحْضُرُ؟</a:t>
@@ -18975,6 +19086,7 @@
                   <a:srgbClr val="1B3B6F"/>
                 </a:solidFill>
                 <a:latin typeface="Amiri" pitchFamily="2" charset="-78"/>
+                <a:ea typeface="Amiri" pitchFamily="2" charset="-78"/>
                 <a:cs typeface="Amiri" pitchFamily="2" charset="-78"/>
               </a:rPr>
               <a:t>عَدَدُ الأَشْخَاصِ</a:t>
@@ -19219,6 +19331,7 @@
                   <a:srgbClr val="1B3B6F"/>
                 </a:solidFill>
                 <a:latin typeface="Amiri" pitchFamily="2" charset="-78"/>
+                <a:ea typeface="Amiri" pitchFamily="2" charset="-78"/>
                 <a:cs typeface="Amiri" pitchFamily="2" charset="-78"/>
               </a:rPr>
               <a:t>أَسْمَاؤُهُمْ</a:t>
@@ -19463,6 +19576,7 @@
                   <a:srgbClr val="1B3B6F"/>
                 </a:solidFill>
                 <a:latin typeface="Amiri" pitchFamily="2" charset="-78"/>
+                <a:ea typeface="Amiri" pitchFamily="2" charset="-78"/>
                 <a:cs typeface="Amiri" pitchFamily="2" charset="-78"/>
               </a:rPr>
               <a:t>طَعَامٌ لَا تَأْكُلُهُ</a:t>
@@ -19707,6 +19821,7 @@
                   <a:srgbClr val="1B3B6F"/>
                 </a:solidFill>
                 <a:latin typeface="Amiri" pitchFamily="2" charset="-78"/>
+                <a:ea typeface="Amiri" pitchFamily="2" charset="-78"/>
                 <a:cs typeface="Amiri" pitchFamily="2" charset="-78"/>
               </a:rPr>
               <a:t>كَيْفَ سَتَصِلُ؟</a:t>
@@ -19951,6 +20066,7 @@
                   <a:srgbClr val="1B3B6F"/>
                 </a:solidFill>
                 <a:latin typeface="Amiri" pitchFamily="2" charset="-78"/>
+                <a:ea typeface="Amiri" pitchFamily="2" charset="-78"/>
                 <a:cs typeface="Amiri" pitchFamily="2" charset="-78"/>
               </a:rPr>
               <a:t>أُغْنِيَةٌ تَطْلُبُهَا</a:t>
@@ -20130,6 +20246,7 @@
                   <a:srgbClr val="1B3B6F"/>
                 </a:solidFill>
                 <a:latin typeface="Amiri" pitchFamily="2" charset="-78"/>
+                <a:ea typeface="Amiri" pitchFamily="2" charset="-78"/>
                 <a:cs typeface="Amiri" pitchFamily="2" charset="-78"/>
               </a:rPr>
               <a:t>جُمْلَةٌ: رِسَالَةٌ قَصِيرَةٌ لِلْعَرُوسَيْنِ</a:t>
@@ -20339,6 +20456,7 @@
                   <a:srgbClr val="D4AF37"/>
                 </a:solidFill>
                 <a:latin typeface="Amiri" pitchFamily="2" charset="-78"/>
+                <a:ea typeface="Amiri" pitchFamily="2" charset="-78"/>
                 <a:cs typeface="Amiri" pitchFamily="2" charset="-78"/>
               </a:rPr>
               <a:t>م</a:t>
@@ -20659,6 +20777,7 @@
                   <a:srgbClr val="8A6D1E"/>
                 </a:solidFill>
                 <a:latin typeface="Amiri" pitchFamily="2" charset="-78"/>
+                <a:ea typeface="Amiri" pitchFamily="2" charset="-78"/>
                 <a:cs typeface="Amiri" pitchFamily="2" charset="-78"/>
               </a:rPr>
               <a:t>نَمُوذَجُ الإِجَابَةِ</a:t>
@@ -20977,6 +21096,7 @@
                   <a:srgbClr val="1B3B6F"/>
                 </a:solidFill>
                 <a:latin typeface="Amiri" pitchFamily="2" charset="-78"/>
+                <a:ea typeface="Amiri" pitchFamily="2" charset="-78"/>
                 <a:cs typeface="Amiri" pitchFamily="2" charset="-78"/>
               </a:rPr>
               <a:t>هِنْدُ سَعِيدٍ</a:t>
@@ -21015,6 +21135,7 @@
                   <a:srgbClr val="1B3B6F"/>
                 </a:solidFill>
                 <a:latin typeface="Amiri" pitchFamily="2" charset="-78"/>
+                <a:ea typeface="Amiri" pitchFamily="2" charset="-78"/>
                 <a:cs typeface="Amiri" pitchFamily="2" charset="-78"/>
               </a:rPr>
               <a:t>الاسْمُ</a:t>
@@ -21156,6 +21277,7 @@
                   <a:srgbClr val="1B3B6F"/>
                 </a:solidFill>
                 <a:latin typeface="Amiri" pitchFamily="2" charset="-78"/>
+                <a:ea typeface="Amiri" pitchFamily="2" charset="-78"/>
                 <a:cs typeface="Amiri" pitchFamily="2" charset="-78"/>
               </a:rPr>
               <a:t>نَعَمْ، بِكُلِّ سُرُورٍ</a:t>
@@ -21194,6 +21316,7 @@
                   <a:srgbClr val="1B3B6F"/>
                 </a:solidFill>
                 <a:latin typeface="Amiri" pitchFamily="2" charset="-78"/>
+                <a:ea typeface="Amiri" pitchFamily="2" charset="-78"/>
                 <a:cs typeface="Amiri" pitchFamily="2" charset="-78"/>
               </a:rPr>
               <a:t>هَلْ سَتَحْضُرُ؟</a:t>
@@ -21335,6 +21458,7 @@
                   <a:srgbClr val="1B3B6F"/>
                 </a:solidFill>
                 <a:latin typeface="Amiri" pitchFamily="2" charset="-78"/>
+                <a:ea typeface="Amiri" pitchFamily="2" charset="-78"/>
                 <a:cs typeface="Amiri" pitchFamily="2" charset="-78"/>
               </a:rPr>
               <a:t>أَرْبَعَةُ أَشْخَاصٍ</a:t>
@@ -21373,6 +21497,7 @@
                   <a:srgbClr val="1B3B6F"/>
                 </a:solidFill>
                 <a:latin typeface="Amiri" pitchFamily="2" charset="-78"/>
+                <a:ea typeface="Amiri" pitchFamily="2" charset="-78"/>
                 <a:cs typeface="Amiri" pitchFamily="2" charset="-78"/>
               </a:rPr>
               <a:t>عَدَدُ الأَشْخَاصِ</a:t>
@@ -21514,6 +21639,7 @@
                   <a:srgbClr val="1B3B6F"/>
                 </a:solidFill>
                 <a:latin typeface="Amiri" pitchFamily="2" charset="-78"/>
+                <a:ea typeface="Amiri" pitchFamily="2" charset="-78"/>
                 <a:cs typeface="Amiri" pitchFamily="2" charset="-78"/>
               </a:rPr>
               <a:t>أَبِي وَأُمِّي وَأَخِي وَأَنَا</a:t>
@@ -21552,6 +21678,7 @@
                   <a:srgbClr val="1B3B6F"/>
                 </a:solidFill>
                 <a:latin typeface="Amiri" pitchFamily="2" charset="-78"/>
+                <a:ea typeface="Amiri" pitchFamily="2" charset="-78"/>
                 <a:cs typeface="Amiri" pitchFamily="2" charset="-78"/>
               </a:rPr>
               <a:t>أَسْمَاؤُهُمْ</a:t>
@@ -21693,6 +21820,7 @@
                   <a:srgbClr val="1B3B6F"/>
                 </a:solidFill>
                 <a:latin typeface="Amiri" pitchFamily="2" charset="-78"/>
+                <a:ea typeface="Amiri" pitchFamily="2" charset="-78"/>
                 <a:cs typeface="Amiri" pitchFamily="2" charset="-78"/>
               </a:rPr>
               <a:t>السَّمَكُ</a:t>
@@ -21731,6 +21859,7 @@
                   <a:srgbClr val="1B3B6F"/>
                 </a:solidFill>
                 <a:latin typeface="Amiri" pitchFamily="2" charset="-78"/>
+                <a:ea typeface="Amiri" pitchFamily="2" charset="-78"/>
                 <a:cs typeface="Amiri" pitchFamily="2" charset="-78"/>
               </a:rPr>
               <a:t>طَعَامٌ لَا تَأْكُلُهُ</a:t>
@@ -21872,6 +22001,7 @@
                   <a:srgbClr val="1B3B6F"/>
                 </a:solidFill>
                 <a:latin typeface="Amiri" pitchFamily="2" charset="-78"/>
+                <a:ea typeface="Amiri" pitchFamily="2" charset="-78"/>
                 <a:cs typeface="Amiri" pitchFamily="2" charset="-78"/>
               </a:rPr>
               <a:t>بِالسَّيَّارَةِ</a:t>
@@ -21910,6 +22040,7 @@
                   <a:srgbClr val="1B3B6F"/>
                 </a:solidFill>
                 <a:latin typeface="Amiri" pitchFamily="2" charset="-78"/>
+                <a:ea typeface="Amiri" pitchFamily="2" charset="-78"/>
                 <a:cs typeface="Amiri" pitchFamily="2" charset="-78"/>
               </a:rPr>
               <a:t>كَيْفَ سَتَصِلُ؟</a:t>
@@ -22051,6 +22182,7 @@
                   <a:srgbClr val="1B3B6F"/>
                 </a:solidFill>
                 <a:latin typeface="Amiri" pitchFamily="2" charset="-78"/>
+                <a:ea typeface="Amiri" pitchFamily="2" charset="-78"/>
                 <a:cs typeface="Amiri" pitchFamily="2" charset="-78"/>
               </a:rPr>
               <a:t>أُغْنِيَةٌ تُرَاثِيَّةٌ أُرْدُنِّيَّةٌ</a:t>
@@ -22089,6 +22221,7 @@
                   <a:srgbClr val="1B3B6F"/>
                 </a:solidFill>
                 <a:latin typeface="Amiri" pitchFamily="2" charset="-78"/>
+                <a:ea typeface="Amiri" pitchFamily="2" charset="-78"/>
                 <a:cs typeface="Amiri" pitchFamily="2" charset="-78"/>
               </a:rPr>
               <a:t>أُغْنِيَةٌ تَطْلُبُهَا</a:t>
@@ -22230,6 +22363,7 @@
                   <a:srgbClr val="1B3B6F"/>
                 </a:solidFill>
                 <a:latin typeface="Amiri" pitchFamily="2" charset="-78"/>
+                <a:ea typeface="Amiri" pitchFamily="2" charset="-78"/>
                 <a:cs typeface="Amiri" pitchFamily="2" charset="-78"/>
               </a:rPr>
               <a:t>أَلْفُ مَبْرُوكٍ، وَنَتَمَنَّى لَكُمَا حَيَاةً سَعِيدَةً مَلِيئَةً بِالحُبِّ.</a:t>
@@ -22268,6 +22402,7 @@
                   <a:srgbClr val="1B3B6F"/>
                 </a:solidFill>
                 <a:latin typeface="Amiri" pitchFamily="2" charset="-78"/>
+                <a:ea typeface="Amiri" pitchFamily="2" charset="-78"/>
                 <a:cs typeface="Amiri" pitchFamily="2" charset="-78"/>
               </a:rPr>
               <a:t>جُمْلَةٌ: رِسَالَةٌ قَصِيرَةٌ لِلْعَرُوسَيْنِ</a:t>
@@ -22477,6 +22612,7 @@
                   <a:srgbClr val="D4AF37"/>
                 </a:solidFill>
                 <a:latin typeface="Amiri" pitchFamily="2" charset="-78"/>
+                <a:ea typeface="Amiri" pitchFamily="2" charset="-78"/>
                 <a:cs typeface="Amiri" pitchFamily="2" charset="-78"/>
               </a:rPr>
               <a:t>م</a:t>
@@ -22797,6 +22933,7 @@
                   <a:srgbClr val="8A6D1E"/>
                 </a:solidFill>
                 <a:latin typeface="Amiri" pitchFamily="2" charset="-78"/>
+                <a:ea typeface="Amiri" pitchFamily="2" charset="-78"/>
                 <a:cs typeface="Amiri" pitchFamily="2" charset="-78"/>
               </a:rPr>
               <a:t>رِسَالَةُ اعْتِذَارٍ عَنْ دَعْوَةٍ</a:t>
@@ -23272,6 +23409,7 @@
                   <a:srgbClr val="1B3B6F"/>
                 </a:solidFill>
                 <a:latin typeface="Amiri" pitchFamily="2" charset="-78"/>
+                <a:ea typeface="Amiri" pitchFamily="2" charset="-78"/>
                 <a:cs typeface="Amiri" pitchFamily="2" charset="-78"/>
               </a:rPr>
               <a:t>شُكْرًا جَزِيلًا عَلَى دَعْوَتِكِ</a:t>
@@ -23348,6 +23486,7 @@
                   <a:srgbClr val="1B3B6F"/>
                 </a:solidFill>
                 <a:latin typeface="Amiri" pitchFamily="2" charset="-78"/>
+                <a:ea typeface="Amiri" pitchFamily="2" charset="-78"/>
                 <a:cs typeface="Amiri" pitchFamily="2" charset="-78"/>
               </a:rPr>
               <a:t>آسِفَةٌ، لَا أَسْتَطِيعُ … لِأَنَّ …</a:t>
@@ -23424,6 +23563,7 @@
                   <a:srgbClr val="1B3B6F"/>
                 </a:solidFill>
                 <a:latin typeface="Amiri" pitchFamily="2" charset="-78"/>
+                <a:ea typeface="Amiri" pitchFamily="2" charset="-78"/>
                 <a:cs typeface="Amiri" pitchFamily="2" charset="-78"/>
               </a:rPr>
               <a:t>أَوَّلًا … ثُمَّ …</a:t>
@@ -23500,6 +23640,7 @@
                   <a:srgbClr val="1B3B6F"/>
                 </a:solidFill>
                 <a:latin typeface="Amiri" pitchFamily="2" charset="-78"/>
+                <a:ea typeface="Amiri" pitchFamily="2" charset="-78"/>
                 <a:cs typeface="Amiri" pitchFamily="2" charset="-78"/>
               </a:rPr>
               <a:t>مَا رَأْيُكِ أَنْ نَلْتَقِيَ …؟</a:t>
@@ -23671,6 +23812,7 @@
                   <a:srgbClr val="D4AF37"/>
                 </a:solidFill>
                 <a:latin typeface="Amiri" pitchFamily="2" charset="-78"/>
+                <a:ea typeface="Amiri" pitchFamily="2" charset="-78"/>
                 <a:cs typeface="Amiri" pitchFamily="2" charset="-78"/>
               </a:rPr>
               <a:t>م</a:t>
@@ -23991,6 +24133,7 @@
                   <a:srgbClr val="8A6D1E"/>
                 </a:solidFill>
                 <a:latin typeface="Amiri" pitchFamily="2" charset="-78"/>
+                <a:ea typeface="Amiri" pitchFamily="2" charset="-78"/>
                 <a:cs typeface="Amiri" pitchFamily="2" charset="-78"/>
               </a:rPr>
               <a:t>نَصُّ السُّؤَالِ</a:t>
@@ -24274,6 +24417,7 @@
                   <a:srgbClr val="1B3B6F"/>
                 </a:solidFill>
                 <a:latin typeface="Amiri" pitchFamily="2" charset="-78"/>
+                <a:ea typeface="Amiri" pitchFamily="2" charset="-78"/>
                 <a:cs typeface="Amiri" pitchFamily="2" charset="-78"/>
               </a:rPr>
               <a:t>دَعَتْكِ صَدِيقَتُكِ إِلَى حَفْلَةِ عِيدِ مِيلَادِهَا، لٰكِنَّكِ لَا تَسْتَطِيعِينَ الذَّهَابَ. اكْتُبِي لَهَا (٨٠–٩٠ كَلِمَةً).</a:t>
@@ -24415,6 +24559,7 @@
                   <a:srgbClr val="1B3B6F"/>
                 </a:solidFill>
                 <a:latin typeface="Amiri" pitchFamily="2" charset="-78"/>
+                <a:ea typeface="Amiri" pitchFamily="2" charset="-78"/>
                 <a:cs typeface="Amiri" pitchFamily="2" charset="-78"/>
               </a:rPr>
               <a:t>اشْكُرِيهَا عَلَى الدَّعْوَةِ.</a:t>
@@ -24556,6 +24701,7 @@
                   <a:srgbClr val="1B3B6F"/>
                 </a:solidFill>
                 <a:latin typeface="Amiri" pitchFamily="2" charset="-78"/>
+                <a:ea typeface="Amiri" pitchFamily="2" charset="-78"/>
                 <a:cs typeface="Amiri" pitchFamily="2" charset="-78"/>
               </a:rPr>
               <a:t>لِمَاذَا لَا تَسْتَطِيعِينَ الحُضُورَ؟</a:t>
@@ -24697,6 +24843,7 @@
                   <a:srgbClr val="1B3B6F"/>
                 </a:solidFill>
                 <a:latin typeface="Amiri" pitchFamily="2" charset="-78"/>
+                <a:ea typeface="Amiri" pitchFamily="2" charset="-78"/>
                 <a:cs typeface="Amiri" pitchFamily="2" charset="-78"/>
               </a:rPr>
               <a:t>مَاذَا فَعَلْتِ الأُسْبُوعَ المَاضِي لِتَسْتَعِدِّي لِمُنَاسَبَةِ أُسْرَتِكِ؟</a:t>
@@ -24838,6 +24985,7 @@
                   <a:srgbClr val="1B3B6F"/>
                 </a:solidFill>
                 <a:latin typeface="Amiri" pitchFamily="2" charset="-78"/>
+                <a:ea typeface="Amiri" pitchFamily="2" charset="-78"/>
                 <a:cs typeface="Amiri" pitchFamily="2" charset="-78"/>
               </a:rPr>
               <a:t>اقْتَرِحِي أَنْ تَحْتَفِلَا مَعًا فِي وَقْتٍ آخَرَ.</a:t>
@@ -25047,6 +25195,7 @@
                   <a:srgbClr val="D4AF37"/>
                 </a:solidFill>
                 <a:latin typeface="Amiri" pitchFamily="2" charset="-78"/>
+                <a:ea typeface="Amiri" pitchFamily="2" charset="-78"/>
                 <a:cs typeface="Amiri" pitchFamily="2" charset="-78"/>
               </a:rPr>
               <a:t>م</a:t>
@@ -25367,6 +25516,7 @@
                   <a:srgbClr val="8A6D1E"/>
                 </a:solidFill>
                 <a:latin typeface="Amiri" pitchFamily="2" charset="-78"/>
+                <a:ea typeface="Amiri" pitchFamily="2" charset="-78"/>
                 <a:cs typeface="Amiri" pitchFamily="2" charset="-78"/>
               </a:rPr>
               <a:t>قَوَالِبُ الكِتَابَةِ</a:t>
@@ -25647,6 +25797,7 @@
                   <a:srgbClr val="1B3B6F"/>
                 </a:solidFill>
                 <a:latin typeface="Amiri" pitchFamily="2" charset="-78"/>
+                <a:ea typeface="Amiri" pitchFamily="2" charset="-78"/>
                 <a:cs typeface="Amiri" pitchFamily="2" charset="-78"/>
               </a:rPr>
               <a:t>عَزِيزَتِي ______ ، كَيْفَ حَالُكِ؟</a:t>
@@ -25853,6 +26004,7 @@
                   <a:srgbClr val="1B3B6F"/>
                 </a:solidFill>
                 <a:latin typeface="Amiri" pitchFamily="2" charset="-78"/>
+                <a:ea typeface="Amiri" pitchFamily="2" charset="-78"/>
                 <a:cs typeface="Amiri" pitchFamily="2" charset="-78"/>
               </a:rPr>
               <a:t>شُكْرًا جَزِيلًا عَلَى دَعْوَتِكِ إِلَى ______ .</a:t>
@@ -26059,6 +26211,7 @@
                   <a:srgbClr val="1B3B6F"/>
                 </a:solidFill>
                 <a:latin typeface="Amiri" pitchFamily="2" charset="-78"/>
+                <a:ea typeface="Amiri" pitchFamily="2" charset="-78"/>
                 <a:cs typeface="Amiri" pitchFamily="2" charset="-78"/>
               </a:rPr>
               <a:t>أَنَا آسِفَةٌ، لَا أَسْتَطِيعُ أَنْ آتِيَ، لِأَنَّ ______ .</a:t>
@@ -26265,6 +26418,7 @@
                   <a:srgbClr val="1B3B6F"/>
                 </a:solidFill>
                 <a:latin typeface="Amiri" pitchFamily="2" charset="-78"/>
+                <a:ea typeface="Amiri" pitchFamily="2" charset="-78"/>
                 <a:cs typeface="Amiri" pitchFamily="2" charset="-78"/>
               </a:rPr>
               <a:t>فِي الأُسْبُوعِ المَاضِي، أَوَّلًا ______ ، ثُمَّ ______ .</a:t>
@@ -26471,6 +26625,7 @@
                   <a:srgbClr val="1B3B6F"/>
                 </a:solidFill>
                 <a:latin typeface="Amiri" pitchFamily="2" charset="-78"/>
+                <a:ea typeface="Amiri" pitchFamily="2" charset="-78"/>
                 <a:cs typeface="Amiri" pitchFamily="2" charset="-78"/>
               </a:rPr>
               <a:t>مَا رَأْيُكِ أَنْ نَلْتَقِيَ يَوْمَ ______ فِي ______ ؟</a:t>
@@ -26677,6 +26832,7 @@
                   <a:srgbClr val="1B3B6F"/>
                 </a:solidFill>
                 <a:latin typeface="Amiri" pitchFamily="2" charset="-78"/>
+                <a:ea typeface="Amiri" pitchFamily="2" charset="-78"/>
                 <a:cs typeface="Amiri" pitchFamily="2" charset="-78"/>
               </a:rPr>
               <a:t>مَعَ مَحَبَّتِي، ______</a:t>
@@ -26916,13 +27072,9 @@
     <a:fontScheme name="Office">
       <a:majorFont>
         <a:latin typeface="Calibri Light" panose="020F0302020204030204"/>
-        <a:ea typeface=""/>
-        <a:cs typeface=""/>
-        <a:font script="Jpan" typeface="游ゴシック Light"/>
-        <a:font script="Hang" typeface="맑은 고딕"/>
-        <a:font script="Hans" typeface="等线 Light"/>
-        <a:font script="Hant" typeface="新細明體"/>
-        <a:font script="Arab" typeface="Times New Roman"/>
+        <a:ea typeface="Amiri" pitchFamily="2" charset="-78"/>
+        <a:cs typeface="Amiri" pitchFamily="2" charset="-78"/>
+        <a:font script="Arab" typeface="Amiri"/>
         <a:font script="Hebr" typeface="Times New Roman"/>
         <a:font script="Thai" typeface="Angsana New"/>
         <a:font script="Ethi" typeface="Nyala"/>
@@ -26968,13 +27120,9 @@
       </a:majorFont>
       <a:minorFont>
         <a:latin typeface="Calibri" panose="020F0502020204030204"/>
-        <a:ea typeface=""/>
-        <a:cs typeface=""/>
-        <a:font script="Jpan" typeface="游ゴシック"/>
-        <a:font script="Hang" typeface="맑은 고딕"/>
-        <a:font script="Hans" typeface="等线"/>
-        <a:font script="Hant" typeface="新細明體"/>
-        <a:font script="Arab" typeface="Arial"/>
+        <a:ea typeface="Amiri" pitchFamily="2" charset="-78"/>
+        <a:cs typeface="Amiri" pitchFamily="2" charset="-78"/>
+        <a:font script="Arab" typeface="Amiri"/>
         <a:font script="Hebr" typeface="Arial"/>
         <a:font script="Thai" typeface="Cordia New"/>
         <a:font script="Ethi" typeface="Nyala"/>

--- a/Topic_B/Exam_Practice/TB-L09_Writing_Workshop_Invitations_Holidays_and_Past_Experiences.pptx
+++ b/Topic_B/Exam_Practice/TB-L09_Writing_Workshop_Invitations_Holidays_and_Past_Experiences.pptx
@@ -3852,7 +3852,7 @@
                 <a:solidFill>
                   <a:srgbClr val="FFFFFF"/>
                 </a:solidFill>
-                <a:latin typeface="Calibri" pitchFamily="34" charset="0"/>
+                <a:latin typeface="Amiri" pitchFamily="2" charset="-78"/>
                 <a:ea typeface="Amiri" pitchFamily="2" charset="-78"/>
                 <a:cs typeface="Amiri" pitchFamily="2" charset="-78"/>
               </a:rPr>
@@ -3918,7 +3918,7 @@
                 <a:solidFill>
                   <a:srgbClr val="FFFFFF"/>
                 </a:solidFill>
-                <a:latin typeface="Calibri" pitchFamily="34" charset="0"/>
+                <a:latin typeface="Amiri" pitchFamily="2" charset="-78"/>
                 <a:ea typeface="Amiri" pitchFamily="2" charset="-78"/>
                 <a:cs typeface="Amiri" pitchFamily="2" charset="-78"/>
               </a:rPr>
@@ -3984,7 +3984,7 @@
                 <a:solidFill>
                   <a:srgbClr val="FFFFFF"/>
                 </a:solidFill>
-                <a:latin typeface="Calibri" pitchFamily="34" charset="0"/>
+                <a:latin typeface="Amiri" pitchFamily="2" charset="-78"/>
                 <a:ea typeface="Amiri" pitchFamily="2" charset="-78"/>
                 <a:cs typeface="Amiri" pitchFamily="2" charset="-78"/>
               </a:rPr>
@@ -4050,7 +4050,7 @@
                 <a:solidFill>
                   <a:srgbClr val="FFFFFF"/>
                 </a:solidFill>
-                <a:latin typeface="Calibri" pitchFamily="34" charset="0"/>
+                <a:latin typeface="Amiri" pitchFamily="2" charset="-78"/>
                 <a:ea typeface="Amiri" pitchFamily="2" charset="-78"/>
                 <a:cs typeface="Amiri" pitchFamily="2" charset="-78"/>
               </a:rPr>
@@ -4848,7 +4848,7 @@
                 <a:solidFill>
                   <a:srgbClr val="FFFFFF"/>
                 </a:solidFill>
-                <a:latin typeface="Calibri" pitchFamily="34" charset="0"/>
+                <a:latin typeface="Amiri" pitchFamily="2" charset="-78"/>
                 <a:ea typeface="Amiri" pitchFamily="2" charset="-78"/>
                 <a:cs typeface="Amiri" pitchFamily="2" charset="-78"/>
               </a:rPr>
@@ -4914,7 +4914,7 @@
                 <a:solidFill>
                   <a:srgbClr val="FFFFFF"/>
                 </a:solidFill>
-                <a:latin typeface="Calibri" pitchFamily="34" charset="0"/>
+                <a:latin typeface="Amiri" pitchFamily="2" charset="-78"/>
                 <a:ea typeface="Amiri" pitchFamily="2" charset="-78"/>
                 <a:cs typeface="Amiri" pitchFamily="2" charset="-78"/>
               </a:rPr>
@@ -4980,7 +4980,7 @@
                 <a:solidFill>
                   <a:srgbClr val="FFFFFF"/>
                 </a:solidFill>
-                <a:latin typeface="Calibri" pitchFamily="34" charset="0"/>
+                <a:latin typeface="Amiri" pitchFamily="2" charset="-78"/>
                 <a:ea typeface="Amiri" pitchFamily="2" charset="-78"/>
                 <a:cs typeface="Amiri" pitchFamily="2" charset="-78"/>
               </a:rPr>
@@ -5046,7 +5046,7 @@
                 <a:solidFill>
                   <a:srgbClr val="FFFFFF"/>
                 </a:solidFill>
-                <a:latin typeface="Calibri" pitchFamily="34" charset="0"/>
+                <a:latin typeface="Amiri" pitchFamily="2" charset="-78"/>
                 <a:ea typeface="Amiri" pitchFamily="2" charset="-78"/>
                 <a:cs typeface="Amiri" pitchFamily="2" charset="-78"/>
               </a:rPr>
@@ -8603,7 +8603,7 @@
                 <a:solidFill>
                   <a:srgbClr val="FFFFFF"/>
                 </a:solidFill>
-                <a:latin typeface="Calibri" pitchFamily="34" charset="0"/>
+                <a:latin typeface="Amiri" pitchFamily="2" charset="-78"/>
                 <a:ea typeface="Amiri" pitchFamily="2" charset="-78"/>
                 <a:cs typeface="Amiri" pitchFamily="2" charset="-78"/>
               </a:rPr>
@@ -8669,7 +8669,7 @@
                 <a:solidFill>
                   <a:srgbClr val="FFFFFF"/>
                 </a:solidFill>
-                <a:latin typeface="Calibri" pitchFamily="34" charset="0"/>
+                <a:latin typeface="Amiri" pitchFamily="2" charset="-78"/>
                 <a:ea typeface="Amiri" pitchFamily="2" charset="-78"/>
                 <a:cs typeface="Amiri" pitchFamily="2" charset="-78"/>
               </a:rPr>
@@ -8735,7 +8735,7 @@
                 <a:solidFill>
                   <a:srgbClr val="FFFFFF"/>
                 </a:solidFill>
-                <a:latin typeface="Calibri" pitchFamily="34" charset="0"/>
+                <a:latin typeface="Amiri" pitchFamily="2" charset="-78"/>
                 <a:ea typeface="Amiri" pitchFamily="2" charset="-78"/>
                 <a:cs typeface="Amiri" pitchFamily="2" charset="-78"/>
               </a:rPr>
@@ -8801,7 +8801,7 @@
                 <a:solidFill>
                   <a:srgbClr val="FFFFFF"/>
                 </a:solidFill>
-                <a:latin typeface="Calibri" pitchFamily="34" charset="0"/>
+                <a:latin typeface="Amiri" pitchFamily="2" charset="-78"/>
                 <a:ea typeface="Amiri" pitchFamily="2" charset="-78"/>
                 <a:cs typeface="Amiri" pitchFamily="2" charset="-78"/>
               </a:rPr>
@@ -9588,7 +9588,7 @@
                 <a:solidFill>
                   <a:srgbClr val="FFFFFF"/>
                 </a:solidFill>
-                <a:latin typeface="Calibri" pitchFamily="34" charset="0"/>
+                <a:latin typeface="Amiri" pitchFamily="2" charset="-78"/>
                 <a:ea typeface="Amiri" pitchFamily="2" charset="-78"/>
                 <a:cs typeface="Amiri" pitchFamily="2" charset="-78"/>
               </a:rPr>
@@ -9654,7 +9654,7 @@
                 <a:solidFill>
                   <a:srgbClr val="FFFFFF"/>
                 </a:solidFill>
-                <a:latin typeface="Calibri" pitchFamily="34" charset="0"/>
+                <a:latin typeface="Amiri" pitchFamily="2" charset="-78"/>
                 <a:ea typeface="Amiri" pitchFamily="2" charset="-78"/>
                 <a:cs typeface="Amiri" pitchFamily="2" charset="-78"/>
               </a:rPr>
@@ -9720,7 +9720,7 @@
                 <a:solidFill>
                   <a:srgbClr val="FFFFFF"/>
                 </a:solidFill>
-                <a:latin typeface="Calibri" pitchFamily="34" charset="0"/>
+                <a:latin typeface="Amiri" pitchFamily="2" charset="-78"/>
                 <a:ea typeface="Amiri" pitchFamily="2" charset="-78"/>
                 <a:cs typeface="Amiri" pitchFamily="2" charset="-78"/>
               </a:rPr>
@@ -9786,7 +9786,7 @@
                 <a:solidFill>
                   <a:srgbClr val="FFFFFF"/>
                 </a:solidFill>
-                <a:latin typeface="Calibri" pitchFamily="34" charset="0"/>
+                <a:latin typeface="Amiri" pitchFamily="2" charset="-78"/>
                 <a:ea typeface="Amiri" pitchFamily="2" charset="-78"/>
                 <a:cs typeface="Amiri" pitchFamily="2" charset="-78"/>
               </a:rPr>
@@ -10573,7 +10573,7 @@
                 <a:solidFill>
                   <a:srgbClr val="FFFFFF"/>
                 </a:solidFill>
-                <a:latin typeface="Calibri" pitchFamily="34" charset="0"/>
+                <a:latin typeface="Amiri" pitchFamily="2" charset="-78"/>
                 <a:ea typeface="Amiri" pitchFamily="2" charset="-78"/>
                 <a:cs typeface="Amiri" pitchFamily="2" charset="-78"/>
               </a:rPr>
@@ -10639,7 +10639,7 @@
                 <a:solidFill>
                   <a:srgbClr val="FFFFFF"/>
                 </a:solidFill>
-                <a:latin typeface="Calibri" pitchFamily="34" charset="0"/>
+                <a:latin typeface="Amiri" pitchFamily="2" charset="-78"/>
                 <a:ea typeface="Amiri" pitchFamily="2" charset="-78"/>
                 <a:cs typeface="Amiri" pitchFamily="2" charset="-78"/>
               </a:rPr>
@@ -10705,7 +10705,7 @@
                 <a:solidFill>
                   <a:srgbClr val="FFFFFF"/>
                 </a:solidFill>
-                <a:latin typeface="Calibri" pitchFamily="34" charset="0"/>
+                <a:latin typeface="Amiri" pitchFamily="2" charset="-78"/>
                 <a:ea typeface="Amiri" pitchFamily="2" charset="-78"/>
                 <a:cs typeface="Amiri" pitchFamily="2" charset="-78"/>
               </a:rPr>
@@ -10771,7 +10771,7 @@
                 <a:solidFill>
                   <a:srgbClr val="FFFFFF"/>
                 </a:solidFill>
-                <a:latin typeface="Calibri" pitchFamily="34" charset="0"/>
+                <a:latin typeface="Amiri" pitchFamily="2" charset="-78"/>
                 <a:ea typeface="Amiri" pitchFamily="2" charset="-78"/>
                 <a:cs typeface="Amiri" pitchFamily="2" charset="-78"/>
               </a:rPr>
